--- a/ComputerArchitecture/Lab1/Arm_Memory_Tagging_Extension_(MTE).pptx
+++ b/ComputerArchitecture/Lab1/Arm_Memory_Tagging_Extension_(MTE).pptx
@@ -4158,49 +4158,6 @@
           </a:p>
         </p:txBody>
       </p:sp>
-      <p:sp>
-        <p:nvSpPr>
-          <p:cNvPr id="5" name="Text 1"/>
-          <p:cNvSpPr/>
-          <p:nvPr/>
-        </p:nvSpPr>
-        <p:spPr>
-          <a:xfrm>
-            <a:off x="1659136" y="2986980"/>
-            <a:ext cx="5825728" cy="261610"/>
-          </a:xfrm>
-          <a:prstGeom prst="rect">
-            <a:avLst/>
-          </a:prstGeom>
-          <a:noFill/>
-          <a:ln/>
-        </p:spPr>
-        <p:txBody>
-          <a:bodyPr wrap="square" lIns="0" tIns="0" rIns="0" bIns="0" rtlCol="0" anchor="t">
-            <a:spAutoFit/>
-          </a:bodyPr>
-          <a:lstStyle/>
-          <a:p>
-            <a:pPr marL="0" indent="0" algn="ctr">
-              <a:buNone/>
-            </a:pPr>
-            <a:r>
-              <a:rPr lang="en-US" sz="1700" b="1" i="1" dirty="0">
-                <a:solidFill>
-                  <a:srgbClr val="57606A"/>
-                </a:solidFill>
-                <a:latin typeface="Georgia" panose="02040502050405020303" pitchFamily="18" charset="0"/>
-                <a:ea typeface="Inter" pitchFamily="34" charset="-122"/>
-                <a:cs typeface="Inter" pitchFamily="34" charset="-120"/>
-              </a:rPr>
-              <a:t>Вопросы?</a:t>
-            </a:r>
-            <a:endParaRPr lang="en-US" sz="1700" b="1" i="1" dirty="0">
-              <a:latin typeface="Georgia" panose="02040502050405020303" pitchFamily="18" charset="0"/>
-            </a:endParaRPr>
-          </a:p>
-        </p:txBody>
-      </p:sp>
     </p:spTree>
   </p:cSld>
   <p:clrMapOvr>
@@ -13141,31 +13098,6 @@
       </p:sp>
       <p:sp>
         <p:nvSpPr>
-          <p:cNvPr id="7" name="Shape 3"/>
-          <p:cNvSpPr/>
-          <p:nvPr/>
-        </p:nvSpPr>
-        <p:spPr>
-          <a:xfrm>
-            <a:off x="292894" y="878681"/>
-            <a:ext cx="8558213" cy="2450306"/>
-          </a:xfrm>
-          <a:prstGeom prst="rect">
-            <a:avLst/>
-          </a:prstGeom>
-          <a:solidFill>
-            <a:srgbClr val="FFFFFF"/>
-          </a:solidFill>
-          <a:ln w="9144">
-            <a:solidFill>
-              <a:srgbClr val="D0D7DE"/>
-            </a:solidFill>
-            <a:prstDash val="solid"/>
-          </a:ln>
-        </p:spPr>
-      </p:sp>
-      <p:sp>
-        <p:nvSpPr>
           <p:cNvPr id="8" name="Shape 4"/>
           <p:cNvSpPr/>
           <p:nvPr/>
@@ -15140,26 +15072,6 @@
             <a:endParaRPr lang="en-US" sz="1600" dirty="0"/>
           </a:p>
         </p:txBody>
-      </p:sp>
-      <p:sp>
-        <p:nvSpPr>
-          <p:cNvPr id="7" name="Shape 3"/>
-          <p:cNvSpPr/>
-          <p:nvPr/>
-        </p:nvSpPr>
-        <p:spPr>
-          <a:xfrm>
-            <a:off x="7144" y="735806"/>
-            <a:ext cx="9129713" cy="4400550"/>
-          </a:xfrm>
-          <a:prstGeom prst="rect">
-            <a:avLst/>
-          </a:prstGeom>
-          <a:solidFill>
-            <a:srgbClr val="FFFFFF"/>
-          </a:solidFill>
-          <a:ln/>
-        </p:spPr>
       </p:sp>
       <p:sp>
         <p:nvSpPr>

--- a/ComputerArchitecture/Lab1/Arm_Memory_Tagging_Extension_(MTE).pptx
+++ b/ComputerArchitecture/Lab1/Arm_Memory_Tagging_Extension_(MTE).pptx
@@ -2504,7 +2504,7 @@
         <p:spPr>
           <a:xfrm>
             <a:off x="350044" y="1003697"/>
-            <a:ext cx="3871913" cy="258961"/>
+            <a:ext cx="3871913" cy="222625"/>
           </a:xfrm>
           <a:prstGeom prst="rect">
             <a:avLst/>
@@ -2522,7 +2522,7 @@
               <a:buNone/>
             </a:pPr>
             <a:r>
-              <a:rPr lang="en-US" sz="1000" b="1" dirty="0">
+              <a:rPr lang="en-US" sz="1000" b="1" dirty="0" err="1">
                 <a:solidFill>
                   <a:srgbClr val="2DA44E"/>
                 </a:solidFill>
@@ -2530,7 +2530,7 @@
                 <a:ea typeface="Fira Code Bold" pitchFamily="34" charset="-122"/>
                 <a:cs typeface="Fira Code Bold" pitchFamily="34" charset="-120"/>
               </a:rPr>
-              <a:t>✓ Рекомендации</a:t>
+              <a:t>Рекомендации</a:t>
             </a:r>
             <a:endParaRPr lang="en-US" sz="1000" dirty="0"/>
           </a:p>
@@ -2927,7 +2927,7 @@
         <p:spPr>
           <a:xfrm>
             <a:off x="4914900" y="1003697"/>
-            <a:ext cx="3879056" cy="258961"/>
+            <a:ext cx="3879056" cy="222625"/>
           </a:xfrm>
           <a:prstGeom prst="rect">
             <a:avLst/>
@@ -2945,7 +2945,7 @@
               <a:buNone/>
             </a:pPr>
             <a:r>
-              <a:rPr lang="en-US" sz="1000" b="1" dirty="0">
+              <a:rPr lang="en-US" sz="1000" b="1" dirty="0" err="1">
                 <a:solidFill>
                   <a:srgbClr val="BF3989"/>
                 </a:solidFill>
@@ -2953,7 +2953,7 @@
                 <a:ea typeface="Fira Code Bold" pitchFamily="34" charset="-122"/>
                 <a:cs typeface="Fira Code Bold" pitchFamily="34" charset="-120"/>
               </a:rPr>
-              <a:t>✗ Ограничения</a:t>
+              <a:t>Ограничения</a:t>
             </a:r>
             <a:endParaRPr lang="en-US" sz="1000" dirty="0"/>
           </a:p>
@@ -14543,26 +14543,6 @@
       </p:sp>
       <p:sp>
         <p:nvSpPr>
-          <p:cNvPr id="46" name="Shape 42"/>
-          <p:cNvSpPr/>
-          <p:nvPr/>
-        </p:nvSpPr>
-        <p:spPr>
-          <a:xfrm>
-            <a:off x="7144" y="3718406"/>
-            <a:ext cx="9129713" cy="1417951"/>
-          </a:xfrm>
-          <a:prstGeom prst="rect">
-            <a:avLst/>
-          </a:prstGeom>
-          <a:solidFill>
-            <a:srgbClr val="FFFFFF"/>
-          </a:solidFill>
-          <a:ln/>
-        </p:spPr>
-      </p:sp>
-      <p:sp>
-        <p:nvSpPr>
           <p:cNvPr id="47" name="Shape 43"/>
           <p:cNvSpPr/>
           <p:nvPr/>
@@ -15000,7 +14980,7 @@
         </p:nvSpPr>
         <p:spPr>
           <a:xfrm>
-            <a:off x="7144" y="7144"/>
+            <a:off x="0" y="7144"/>
             <a:ext cx="9129713" cy="735806"/>
           </a:xfrm>
           <a:prstGeom prst="rect">
@@ -15041,7 +15021,7 @@
         <p:spPr>
           <a:xfrm>
             <a:off x="435769" y="292894"/>
-            <a:ext cx="8272463" cy="300038"/>
+            <a:ext cx="8272463" cy="246221"/>
           </a:xfrm>
           <a:prstGeom prst="rect">
             <a:avLst/>
@@ -15067,7 +15047,7 @@
                 <a:ea typeface="Fira Code Bold" pitchFamily="34" charset="-122"/>
                 <a:cs typeface="Fira Code Bold" pitchFamily="34" charset="-120"/>
               </a:rPr>
-              <a:t>От спецификации 2019 до mass-market production в 2023–2025</a:t>
+              <a:t>От спецификации 2019 до mass-market production в 2023–2026</a:t>
             </a:r>
             <a:endParaRPr lang="en-US" sz="1600" dirty="0"/>
           </a:p>
@@ -16252,26 +16232,6 @@
             </a:endParaRPr>
           </a:p>
         </p:txBody>
-      </p:sp>
-      <p:sp>
-        <p:nvSpPr>
-          <p:cNvPr id="32" name="Shape 28"/>
-          <p:cNvSpPr/>
-          <p:nvPr/>
-        </p:nvSpPr>
-        <p:spPr>
-          <a:xfrm>
-            <a:off x="6093619" y="735806"/>
-            <a:ext cx="3043238" cy="4400550"/>
-          </a:xfrm>
-          <a:prstGeom prst="rect">
-            <a:avLst/>
-          </a:prstGeom>
-          <a:solidFill>
-            <a:srgbClr val="F6F8FA"/>
-          </a:solidFill>
-          <a:ln/>
-        </p:spPr>
       </p:sp>
       <p:sp>
         <p:nvSpPr>
